--- a/doc/partner/システム概要のご説明_キューテスト様.pptx
+++ b/doc/partner/システム概要のご説明_キューテスト様.pptx
@@ -5856,7 +5856,7 @@
                 <a:ea typeface="IPAPGothic"/>
                 <a:cs typeface="IPAPGothic"/>
               </a:rPr>
-              <a:t>03:00</a:t>
+              <a:t>04:00</a:t>
             </a:r>
           </a:p>
         </p:txBody>
@@ -5898,7 +5898,7 @@
                 <a:ea typeface="IPAPGothic"/>
                 <a:cs typeface="IPAPGothic"/>
               </a:rPr>
-              <a:t>お客様の情報の取り込み</a:t>
+              <a:t>整理</a:t>
             </a:r>
           </a:p>
         </p:txBody>
@@ -5940,7 +5940,7 @@
                 <a:ea typeface="IPAPGothic"/>
                 <a:cs typeface="IPAPGothic"/>
               </a:rPr>
-              <a:t>RESERVAの最新のCSVを取り込む。お客様が2割を超えて消えるときは止めて確認を待つ</a:t>
+              <a:t>保存の期限を過ぎた記録や使われなくなったファイルを片付ける</a:t>
             </a:r>
           </a:p>
         </p:txBody>
@@ -6070,7 +6070,7 @@
                 <a:ea typeface="IPAPGothic"/>
                 <a:cs typeface="IPAPGothic"/>
               </a:rPr>
-              <a:t>04:00</a:t>
+              <a:t>10分ごと</a:t>
             </a:r>
           </a:p>
         </p:txBody>
@@ -6112,7 +6112,7 @@
                 <a:ea typeface="IPAPGothic"/>
                 <a:cs typeface="IPAPGothic"/>
               </a:rPr>
-              <a:t>整理</a:t>
+              <a:t>お客様の情報の取り込み</a:t>
             </a:r>
           </a:p>
         </p:txBody>
@@ -6154,7 +6154,7 @@
                 <a:ea typeface="IPAPGothic"/>
                 <a:cs typeface="IPAPGothic"/>
               </a:rPr>
-              <a:t>保存の期限を過ぎた記録や使われなくなったファイルを片付ける</a:t>
+              <a:t>RESERVAの新しいCSVを取り込む。お客様が2割を超えて消えるときは止めて確認を待つ</a:t>
             </a:r>
           </a:p>
         </p:txBody>
@@ -11748,7 +11748,7 @@
                 <a:ea typeface="IPAPGothic"/>
                 <a:cs typeface="IPAPGothic"/>
               </a:rPr>
-              <a:t>直すときはRESERVA側で直し、夜の取り込み(3時）を待つ</a:t>
+              <a:t>直すときはRESERVA側で直し、取り込み(10分ごと。急ぐときは「今すぐ取り込む」）を待つ</a:t>
             </a:r>
           </a:p>
         </p:txBody>
@@ -27000,7 +27000,7 @@
                 <a:ea typeface="IPAPGothic"/>
                 <a:cs typeface="IPAPGothic"/>
               </a:rPr>
-              <a:t>RESERVAのCSVを毎晩3時に取り込む（アプリの画面では直さない）</a:t>
+              <a:t>RESERVAのCSVを10分ごとに取り込む（アプリの画面では直さない）</a:t>
             </a:r>
           </a:p>
         </p:txBody>

--- a/doc/partner/システム概要のご説明_キューテスト様.pptx
+++ b/doc/partner/システム概要のご説明_キューテスト様.pptx
@@ -8262,7 +8262,7 @@
                 <a:ea typeface="IPAPGothic"/>
                 <a:cs typeface="IPAPGothic"/>
               </a:rPr>
-              <a:t>何度も間違えると一時的に止める（当てずっぽうの総当たりを防ぐ）</a:t>
+              <a:t>何度も間違えると一時的に止める。いつも使う端末のご本人は、他の人の総当たりに巻き込まれない</a:t>
             </a:r>
           </a:p>
         </p:txBody>
@@ -13760,7 +13760,7 @@
                 <a:ea typeface="IPAPGothic"/>
                 <a:cs typeface="IPAPGothic"/>
               </a:rPr>
-              <a:t>設計図（設定のファイル）はできている。Google Cloudでの構築と確認はこれから（切り替えの前に行う）</a:t>
+              <a:t>Google Cloudの環境は作成済みで基本の動作も確認済み。会社の登録・夜間の自動処理・各種連携の設定はこれから（切り替えの前に行う）</a:t>
             </a:r>
           </a:p>
         </p:txBody>
